--- a/mobiquant_deck/mobiquant_summary.pptx
+++ b/mobiquant_deck/mobiquant_summary.pptx
@@ -6789,27 +6789,21 @@
       <p:grpSpPr/>
       <p:sp>
         <p:nvSpPr>
-          <p:cNvPr id="5" name="DeckTitle"/>
-          <p:cNvSpPr txBox="1"/>
-          <p:nvPr/>
-        </p:nvSpPr>
-        <p:spPr>
-          <a:xfrm>
-            <a:off x="1078992" y="768096"/>
-            <a:ext cx="8869680" cy="658368"/>
-          </a:xfrm>
-          <a:prstGeom prst="rect">
-            <a:avLst/>
-          </a:prstGeom>
-          <a:noFill/>
-        </p:spPr>
-        <p:txBody>
-          <a:bodyPr wrap="none">
-            <a:spAutoFit/>
-          </a:bodyPr>
+          <p:cNvPr id="2" name="DeckTitle"/>
+          <p:cNvSpPr>
+            <a:spLocks noGrp="1"/>
+          </p:cNvSpPr>
+          <p:nvPr>
+            <p:ph type="title"/>
+          </p:nvPr>
+        </p:nvSpPr>
+        <p:spPr/>
+        <p:txBody>
+          <a:bodyPr/>
           <a:lstStyle/>
           <a:p>
             <a:pPr algn="l">
+              <a:buNone/>
               <a:defRPr sz="3100" b="0">
                 <a:solidFill>
                   <a:srgbClr val="000000"/>
@@ -6825,7 +6819,7 @@
       </p:sp>
       <p:sp>
         <p:nvSpPr>
-          <p:cNvPr id="6" name="TextBox 5"/>
+          <p:cNvPr id="3" name="TextBox 2"/>
           <p:cNvSpPr txBox="1"/>
           <p:nvPr/>
         </p:nvSpPr>
@@ -6854,14 +6848,14 @@
               </a:defRPr>
             </a:pPr>
             <a:r>
-              <a:t>Goal: one quantized LLM should adapt precision online as latency and memory budgets change.</a:t>
+              <a:t>Goal: adapt one quantized LLM to changing latency and memory budgets.</a:t>
             </a:r>
           </a:p>
         </p:txBody>
       </p:sp>
       <p:sp>
         <p:nvSpPr>
-          <p:cNvPr id="7" name="Rounded Rectangle 6"/>
+          <p:cNvPr id="4" name="Rounded Rectangle 3"/>
           <p:cNvSpPr/>
           <p:nvPr/>
         </p:nvSpPr>
@@ -6964,7 +6958,7 @@
       </p:sp>
       <p:sp>
         <p:nvSpPr>
-          <p:cNvPr id="8" name="Rounded Rectangle 7"/>
+          <p:cNvPr id="5" name="Rounded Rectangle 4"/>
           <p:cNvSpPr/>
           <p:nvPr/>
         </p:nvSpPr>
@@ -7067,7 +7061,7 @@
       </p:sp>
       <p:sp>
         <p:nvSpPr>
-          <p:cNvPr id="9" name="Rounded Rectangle 8"/>
+          <p:cNvPr id="6" name="Rounded Rectangle 5"/>
           <p:cNvSpPr/>
           <p:nvPr/>
         </p:nvSpPr>
@@ -7170,7 +7164,7 @@
       </p:sp>
       <p:sp>
         <p:nvSpPr>
-          <p:cNvPr id="10" name="Rounded Rectangle 9"/>
+          <p:cNvPr id="7" name="Rounded Rectangle 6"/>
           <p:cNvSpPr/>
           <p:nvPr/>
         </p:nvSpPr>
@@ -7225,7 +7219,7 @@
       </p:sp>
       <p:sp>
         <p:nvSpPr>
-          <p:cNvPr id="11" name="TextBox 10"/>
+          <p:cNvPr id="8" name="TextBox 7"/>
           <p:cNvSpPr txBox="1"/>
           <p:nvPr/>
         </p:nvSpPr>
@@ -7261,7 +7255,7 @@
       </p:sp>
       <p:sp>
         <p:nvSpPr>
-          <p:cNvPr id="12" name="TextBox 11"/>
+          <p:cNvPr id="9" name="TextBox 8"/>
           <p:cNvSpPr txBox="1"/>
           <p:nvPr/>
         </p:nvSpPr>
@@ -7315,27 +7309,21 @@
       <p:grpSpPr/>
       <p:sp>
         <p:nvSpPr>
-          <p:cNvPr id="7" name="DeckTitle"/>
-          <p:cNvSpPr txBox="1"/>
-          <p:nvPr/>
-        </p:nvSpPr>
-        <p:spPr>
-          <a:xfrm>
-            <a:off x="1078992" y="768096"/>
-            <a:ext cx="8869680" cy="658368"/>
-          </a:xfrm>
-          <a:prstGeom prst="rect">
-            <a:avLst/>
-          </a:prstGeom>
-          <a:noFill/>
-        </p:spPr>
-        <p:txBody>
-          <a:bodyPr wrap="none">
-            <a:spAutoFit/>
-          </a:bodyPr>
+          <p:cNvPr id="2" name="DeckTitle"/>
+          <p:cNvSpPr>
+            <a:spLocks noGrp="1"/>
+          </p:cNvSpPr>
+          <p:nvPr>
+            <p:ph type="title"/>
+          </p:nvPr>
+        </p:nvSpPr>
+        <p:spPr/>
+        <p:txBody>
+          <a:bodyPr/>
           <a:lstStyle/>
           <a:p>
             <a:pPr algn="l">
+              <a:buNone/>
               <a:defRPr sz="3100" b="0">
                 <a:solidFill>
                   <a:srgbClr val="000000"/>
@@ -7351,7 +7339,7 @@
       </p:sp>
       <p:sp>
         <p:nvSpPr>
-          <p:cNvPr id="8" name="TextBox 7"/>
+          <p:cNvPr id="3" name="TextBox 2"/>
           <p:cNvSpPr txBox="1"/>
           <p:nvPr/>
         </p:nvSpPr>
@@ -7387,7 +7375,7 @@
       </p:sp>
       <p:sp>
         <p:nvSpPr>
-          <p:cNvPr id="9" name="Rounded Rectangle 8"/>
+          <p:cNvPr id="4" name="Rounded Rectangle 3"/>
           <p:cNvSpPr/>
           <p:nvPr/>
         </p:nvSpPr>
@@ -7474,7 +7462,7 @@
       </p:sp>
       <p:sp>
         <p:nvSpPr>
-          <p:cNvPr id="10" name="Rounded Rectangle 9"/>
+          <p:cNvPr id="5" name="Rounded Rectangle 4"/>
           <p:cNvSpPr/>
           <p:nvPr/>
         </p:nvSpPr>
@@ -7561,7 +7549,7 @@
       </p:sp>
       <p:sp>
         <p:nvSpPr>
-          <p:cNvPr id="11" name="TextBox 10"/>
+          <p:cNvPr id="6" name="TextBox 5"/>
           <p:cNvSpPr txBox="1"/>
           <p:nvPr/>
         </p:nvSpPr>
@@ -7597,7 +7585,7 @@
       </p:sp>
       <p:sp>
         <p:nvSpPr>
-          <p:cNvPr id="12" name="Rectangle 11"/>
+          <p:cNvPr id="7" name="Rectangle 6"/>
           <p:cNvSpPr/>
           <p:nvPr/>
         </p:nvSpPr>
@@ -7642,7 +7630,7 @@
       </p:sp>
       <p:sp>
         <p:nvSpPr>
-          <p:cNvPr id="13" name="TextBox 12"/>
+          <p:cNvPr id="8" name="TextBox 7"/>
           <p:cNvSpPr txBox="1"/>
           <p:nvPr/>
         </p:nvSpPr>
@@ -7678,7 +7666,7 @@
       </p:sp>
       <p:sp>
         <p:nvSpPr>
-          <p:cNvPr id="14" name="TextBox 13"/>
+          <p:cNvPr id="9" name="TextBox 8"/>
           <p:cNvSpPr txBox="1"/>
           <p:nvPr/>
         </p:nvSpPr>
@@ -7714,7 +7702,7 @@
       </p:sp>
       <p:sp>
         <p:nvSpPr>
-          <p:cNvPr id="15" name="Rectangle 14"/>
+          <p:cNvPr id="10" name="Rectangle 9"/>
           <p:cNvSpPr/>
           <p:nvPr/>
         </p:nvSpPr>
@@ -7759,7 +7747,7 @@
       </p:sp>
       <p:sp>
         <p:nvSpPr>
-          <p:cNvPr id="16" name="TextBox 15"/>
+          <p:cNvPr id="11" name="TextBox 10"/>
           <p:cNvSpPr txBox="1"/>
           <p:nvPr/>
         </p:nvSpPr>
@@ -7795,7 +7783,7 @@
       </p:sp>
       <p:sp>
         <p:nvSpPr>
-          <p:cNvPr id="17" name="TextBox 16"/>
+          <p:cNvPr id="12" name="TextBox 11"/>
           <p:cNvSpPr txBox="1"/>
           <p:nvPr/>
         </p:nvSpPr>
@@ -7831,7 +7819,7 @@
       </p:sp>
       <p:sp>
         <p:nvSpPr>
-          <p:cNvPr id="18" name="Rectangle 17"/>
+          <p:cNvPr id="13" name="Rectangle 12"/>
           <p:cNvSpPr/>
           <p:nvPr/>
         </p:nvSpPr>
@@ -7876,7 +7864,7 @@
       </p:sp>
       <p:sp>
         <p:nvSpPr>
-          <p:cNvPr id="19" name="TextBox 18"/>
+          <p:cNvPr id="14" name="TextBox 13"/>
           <p:cNvSpPr txBox="1"/>
           <p:nvPr/>
         </p:nvSpPr>
@@ -7912,7 +7900,7 @@
       </p:sp>
       <p:sp>
         <p:nvSpPr>
-          <p:cNvPr id="20" name="TextBox 19"/>
+          <p:cNvPr id="15" name="TextBox 14"/>
           <p:cNvSpPr txBox="1"/>
           <p:nvPr/>
         </p:nvSpPr>
@@ -7948,7 +7936,7 @@
       </p:sp>
       <p:sp>
         <p:nvSpPr>
-          <p:cNvPr id="21" name="Rectangle 20"/>
+          <p:cNvPr id="16" name="Rectangle 15"/>
           <p:cNvSpPr/>
           <p:nvPr/>
         </p:nvSpPr>
@@ -7993,7 +7981,7 @@
       </p:sp>
       <p:sp>
         <p:nvSpPr>
-          <p:cNvPr id="22" name="TextBox 21"/>
+          <p:cNvPr id="17" name="TextBox 16"/>
           <p:cNvSpPr txBox="1"/>
           <p:nvPr/>
         </p:nvSpPr>
@@ -8029,7 +8017,7 @@
       </p:sp>
       <p:sp>
         <p:nvSpPr>
-          <p:cNvPr id="23" name="TextBox 22"/>
+          <p:cNvPr id="18" name="TextBox 17"/>
           <p:cNvSpPr txBox="1"/>
           <p:nvPr/>
         </p:nvSpPr>
@@ -8065,7 +8053,7 @@
       </p:sp>
       <p:cxnSp>
         <p:nvCxnSpPr>
-          <p:cNvPr id="24" name="Connector 23"/>
+          <p:cNvPr id="19" name="Connector 18"/>
           <p:cNvCxnSpPr/>
           <p:nvPr/>
         </p:nvCxnSpPr>
@@ -8100,7 +8088,7 @@
       </p:cxnSp>
       <p:cxnSp>
         <p:nvCxnSpPr>
-          <p:cNvPr id="25" name="Connector 24"/>
+          <p:cNvPr id="20" name="Connector 19"/>
           <p:cNvCxnSpPr/>
           <p:nvPr/>
         </p:nvCxnSpPr>
@@ -8135,7 +8123,7 @@
       </p:cxnSp>
       <p:sp>
         <p:nvSpPr>
-          <p:cNvPr id="26" name="TextBox 25"/>
+          <p:cNvPr id="21" name="TextBox 20"/>
           <p:cNvSpPr txBox="1"/>
           <p:nvPr/>
         </p:nvSpPr>
@@ -8171,7 +8159,7 @@
       </p:sp>
       <p:cxnSp>
         <p:nvCxnSpPr>
-          <p:cNvPr id="27" name="Connector 26"/>
+          <p:cNvPr id="22" name="Connector 21"/>
           <p:cNvCxnSpPr/>
           <p:nvPr/>
         </p:nvCxnSpPr>
@@ -8206,7 +8194,7 @@
       </p:cxnSp>
       <p:sp>
         <p:nvSpPr>
-          <p:cNvPr id="28" name="TextBox 27"/>
+          <p:cNvPr id="23" name="TextBox 22"/>
           <p:cNvSpPr txBox="1"/>
           <p:nvPr/>
         </p:nvSpPr>
@@ -8242,7 +8230,7 @@
       </p:sp>
       <p:sp>
         <p:nvSpPr>
-          <p:cNvPr id="29" name="Rectangle 28"/>
+          <p:cNvPr id="24" name="Rectangle 23"/>
           <p:cNvSpPr/>
           <p:nvPr/>
         </p:nvSpPr>
@@ -8287,7 +8275,7 @@
       </p:sp>
       <p:sp>
         <p:nvSpPr>
-          <p:cNvPr id="30" name="Rectangle 29"/>
+          <p:cNvPr id="25" name="Rectangle 24"/>
           <p:cNvSpPr/>
           <p:nvPr/>
         </p:nvSpPr>
@@ -8332,7 +8320,7 @@
       </p:sp>
       <p:sp>
         <p:nvSpPr>
-          <p:cNvPr id="31" name="Rectangle 30"/>
+          <p:cNvPr id="26" name="Rectangle 25"/>
           <p:cNvSpPr/>
           <p:nvPr/>
         </p:nvSpPr>
@@ -8377,7 +8365,7 @@
       </p:sp>
       <p:sp>
         <p:nvSpPr>
-          <p:cNvPr id="32" name="Rectangle 31"/>
+          <p:cNvPr id="27" name="Rectangle 26"/>
           <p:cNvSpPr/>
           <p:nvPr/>
         </p:nvSpPr>
@@ -8422,7 +8410,7 @@
       </p:sp>
       <p:sp>
         <p:nvSpPr>
-          <p:cNvPr id="33" name="Rectangle 32"/>
+          <p:cNvPr id="28" name="Rectangle 27"/>
           <p:cNvSpPr/>
           <p:nvPr/>
         </p:nvSpPr>
@@ -8467,7 +8455,7 @@
       </p:sp>
       <p:sp>
         <p:nvSpPr>
-          <p:cNvPr id="34" name="Rectangle 33"/>
+          <p:cNvPr id="29" name="Rectangle 28"/>
           <p:cNvSpPr/>
           <p:nvPr/>
         </p:nvSpPr>
@@ -8512,7 +8500,7 @@
       </p:sp>
       <p:sp>
         <p:nvSpPr>
-          <p:cNvPr id="35" name="Rectangle 34"/>
+          <p:cNvPr id="30" name="Rectangle 29"/>
           <p:cNvSpPr/>
           <p:nvPr/>
         </p:nvSpPr>
@@ -8557,7 +8545,7 @@
       </p:sp>
       <p:sp>
         <p:nvSpPr>
-          <p:cNvPr id="36" name="Rectangle 35"/>
+          <p:cNvPr id="31" name="Rectangle 30"/>
           <p:cNvSpPr/>
           <p:nvPr/>
         </p:nvSpPr>
@@ -8602,7 +8590,7 @@
       </p:sp>
       <p:sp>
         <p:nvSpPr>
-          <p:cNvPr id="37" name="Rectangle 36"/>
+          <p:cNvPr id="32" name="Rectangle 31"/>
           <p:cNvSpPr/>
           <p:nvPr/>
         </p:nvSpPr>
@@ -8647,7 +8635,7 @@
       </p:sp>
       <p:sp>
         <p:nvSpPr>
-          <p:cNvPr id="38" name="Rectangle 37"/>
+          <p:cNvPr id="33" name="Rectangle 32"/>
           <p:cNvSpPr/>
           <p:nvPr/>
         </p:nvSpPr>
@@ -8692,7 +8680,7 @@
       </p:sp>
       <p:sp>
         <p:nvSpPr>
-          <p:cNvPr id="39" name="Rectangle 38"/>
+          <p:cNvPr id="34" name="Rectangle 33"/>
           <p:cNvSpPr/>
           <p:nvPr/>
         </p:nvSpPr>
@@ -8737,7 +8725,7 @@
       </p:sp>
       <p:sp>
         <p:nvSpPr>
-          <p:cNvPr id="40" name="Rectangle 39"/>
+          <p:cNvPr id="35" name="Rectangle 34"/>
           <p:cNvSpPr/>
           <p:nvPr/>
         </p:nvSpPr>
@@ -8782,7 +8770,7 @@
       </p:sp>
       <p:sp>
         <p:nvSpPr>
-          <p:cNvPr id="41" name="Rectangle 40"/>
+          <p:cNvPr id="36" name="Rectangle 35"/>
           <p:cNvSpPr/>
           <p:nvPr/>
         </p:nvSpPr>
@@ -8827,7 +8815,7 @@
       </p:sp>
       <p:sp>
         <p:nvSpPr>
-          <p:cNvPr id="42" name="Rectangle 41"/>
+          <p:cNvPr id="37" name="Rectangle 36"/>
           <p:cNvSpPr/>
           <p:nvPr/>
         </p:nvSpPr>
@@ -8872,7 +8860,7 @@
       </p:sp>
       <p:sp>
         <p:nvSpPr>
-          <p:cNvPr id="43" name="Rectangle 42"/>
+          <p:cNvPr id="38" name="Rectangle 37"/>
           <p:cNvSpPr/>
           <p:nvPr/>
         </p:nvSpPr>
@@ -8917,7 +8905,7 @@
       </p:sp>
       <p:sp>
         <p:nvSpPr>
-          <p:cNvPr id="44" name="Rectangle 43"/>
+          <p:cNvPr id="39" name="Rectangle 38"/>
           <p:cNvSpPr/>
           <p:nvPr/>
         </p:nvSpPr>
@@ -8962,7 +8950,7 @@
       </p:sp>
       <p:sp>
         <p:nvSpPr>
-          <p:cNvPr id="45" name="Rectangle 44"/>
+          <p:cNvPr id="40" name="Rectangle 39"/>
           <p:cNvSpPr/>
           <p:nvPr/>
         </p:nvSpPr>
@@ -9007,7 +8995,7 @@
       </p:sp>
       <p:sp>
         <p:nvSpPr>
-          <p:cNvPr id="46" name="Rectangle 45"/>
+          <p:cNvPr id="41" name="Rectangle 40"/>
           <p:cNvSpPr/>
           <p:nvPr/>
         </p:nvSpPr>
@@ -9052,7 +9040,7 @@
       </p:sp>
       <p:sp>
         <p:nvSpPr>
-          <p:cNvPr id="47" name="Rectangle 46"/>
+          <p:cNvPr id="42" name="Rectangle 41"/>
           <p:cNvSpPr/>
           <p:nvPr/>
         </p:nvSpPr>
@@ -9097,7 +9085,7 @@
       </p:sp>
       <p:sp>
         <p:nvSpPr>
-          <p:cNvPr id="48" name="Rectangle 47"/>
+          <p:cNvPr id="43" name="Rectangle 42"/>
           <p:cNvSpPr/>
           <p:nvPr/>
         </p:nvSpPr>
@@ -9142,7 +9130,7 @@
       </p:sp>
       <p:sp>
         <p:nvSpPr>
-          <p:cNvPr id="49" name="Rectangle 48"/>
+          <p:cNvPr id="44" name="Rectangle 43"/>
           <p:cNvSpPr/>
           <p:nvPr/>
         </p:nvSpPr>
@@ -9187,7 +9175,7 @@
       </p:sp>
       <p:sp>
         <p:nvSpPr>
-          <p:cNvPr id="50" name="Rectangle 49"/>
+          <p:cNvPr id="45" name="Rectangle 44"/>
           <p:cNvSpPr/>
           <p:nvPr/>
         </p:nvSpPr>
@@ -9232,7 +9220,7 @@
       </p:sp>
       <p:sp>
         <p:nvSpPr>
-          <p:cNvPr id="51" name="Rectangle 50"/>
+          <p:cNvPr id="46" name="Rectangle 45"/>
           <p:cNvSpPr/>
           <p:nvPr/>
         </p:nvSpPr>
@@ -9277,7 +9265,7 @@
       </p:sp>
       <p:sp>
         <p:nvSpPr>
-          <p:cNvPr id="52" name="Rectangle 51"/>
+          <p:cNvPr id="47" name="Rectangle 46"/>
           <p:cNvSpPr/>
           <p:nvPr/>
         </p:nvSpPr>
@@ -9322,7 +9310,7 @@
       </p:sp>
       <p:sp>
         <p:nvSpPr>
-          <p:cNvPr id="53" name="Rectangle 52"/>
+          <p:cNvPr id="48" name="Rectangle 47"/>
           <p:cNvSpPr/>
           <p:nvPr/>
         </p:nvSpPr>
@@ -9367,7 +9355,7 @@
       </p:sp>
       <p:sp>
         <p:nvSpPr>
-          <p:cNvPr id="54" name="Rectangle 53"/>
+          <p:cNvPr id="49" name="Rectangle 48"/>
           <p:cNvSpPr/>
           <p:nvPr/>
         </p:nvSpPr>
@@ -9412,7 +9400,7 @@
       </p:sp>
       <p:sp>
         <p:nvSpPr>
-          <p:cNvPr id="55" name="Rectangle 54"/>
+          <p:cNvPr id="50" name="Rectangle 49"/>
           <p:cNvSpPr/>
           <p:nvPr/>
         </p:nvSpPr>
@@ -9457,7 +9445,7 @@
       </p:sp>
       <p:sp>
         <p:nvSpPr>
-          <p:cNvPr id="56" name="Rectangle 55"/>
+          <p:cNvPr id="51" name="Rectangle 50"/>
           <p:cNvSpPr/>
           <p:nvPr/>
         </p:nvSpPr>
@@ -9502,7 +9490,7 @@
       </p:sp>
       <p:sp>
         <p:nvSpPr>
-          <p:cNvPr id="57" name="Rectangle 56"/>
+          <p:cNvPr id="52" name="Rectangle 51"/>
           <p:cNvSpPr/>
           <p:nvPr/>
         </p:nvSpPr>
@@ -9547,7 +9535,7 @@
       </p:sp>
       <p:sp>
         <p:nvSpPr>
-          <p:cNvPr id="58" name="Rectangle 57"/>
+          <p:cNvPr id="53" name="Rectangle 52"/>
           <p:cNvSpPr/>
           <p:nvPr/>
         </p:nvSpPr>
@@ -9592,7 +9580,7 @@
       </p:sp>
       <p:sp>
         <p:nvSpPr>
-          <p:cNvPr id="59" name="Rectangle 58"/>
+          <p:cNvPr id="54" name="Rectangle 53"/>
           <p:cNvSpPr/>
           <p:nvPr/>
         </p:nvSpPr>
@@ -9637,7 +9625,7 @@
       </p:sp>
       <p:sp>
         <p:nvSpPr>
-          <p:cNvPr id="60" name="Rectangle 59"/>
+          <p:cNvPr id="55" name="Rectangle 54"/>
           <p:cNvSpPr/>
           <p:nvPr/>
         </p:nvSpPr>
@@ -9682,7 +9670,7 @@
       </p:sp>
       <p:sp>
         <p:nvSpPr>
-          <p:cNvPr id="61" name="Rectangle 60"/>
+          <p:cNvPr id="56" name="Rectangle 55"/>
           <p:cNvSpPr/>
           <p:nvPr/>
         </p:nvSpPr>
@@ -9727,7 +9715,7 @@
       </p:sp>
       <p:sp>
         <p:nvSpPr>
-          <p:cNvPr id="62" name="Rectangle 61"/>
+          <p:cNvPr id="57" name="Rectangle 56"/>
           <p:cNvSpPr/>
           <p:nvPr/>
         </p:nvSpPr>
@@ -9772,7 +9760,7 @@
       </p:sp>
       <p:sp>
         <p:nvSpPr>
-          <p:cNvPr id="63" name="Rectangle 62"/>
+          <p:cNvPr id="58" name="Rectangle 57"/>
           <p:cNvSpPr/>
           <p:nvPr/>
         </p:nvSpPr>
@@ -9817,7 +9805,7 @@
       </p:sp>
       <p:sp>
         <p:nvSpPr>
-          <p:cNvPr id="64" name="Rectangle 63"/>
+          <p:cNvPr id="59" name="Rectangle 58"/>
           <p:cNvSpPr/>
           <p:nvPr/>
         </p:nvSpPr>
@@ -9862,7 +9850,7 @@
       </p:sp>
       <p:sp>
         <p:nvSpPr>
-          <p:cNvPr id="65" name="Rectangle 64"/>
+          <p:cNvPr id="60" name="Rectangle 59"/>
           <p:cNvSpPr/>
           <p:nvPr/>
         </p:nvSpPr>
@@ -9907,7 +9895,7 @@
       </p:sp>
       <p:sp>
         <p:nvSpPr>
-          <p:cNvPr id="66" name="Rounded Rectangle 65"/>
+          <p:cNvPr id="61" name="Rounded Rectangle 60"/>
           <p:cNvSpPr/>
           <p:nvPr/>
         </p:nvSpPr>
@@ -9962,7 +9950,7 @@
       </p:sp>
       <p:sp>
         <p:nvSpPr>
-          <p:cNvPr id="67" name="Rounded Rectangle 66"/>
+          <p:cNvPr id="62" name="Rounded Rectangle 61"/>
           <p:cNvSpPr/>
           <p:nvPr/>
         </p:nvSpPr>
@@ -10017,7 +10005,7 @@
       </p:sp>
       <p:sp>
         <p:nvSpPr>
-          <p:cNvPr id="68" name="Rounded Rectangle 67"/>
+          <p:cNvPr id="63" name="Rounded Rectangle 62"/>
           <p:cNvSpPr/>
           <p:nvPr/>
         </p:nvSpPr>
@@ -10072,7 +10060,7 @@
       </p:sp>
       <p:sp>
         <p:nvSpPr>
-          <p:cNvPr id="69" name="TextBox 68"/>
+          <p:cNvPr id="64" name="TextBox 63"/>
           <p:cNvSpPr txBox="1"/>
           <p:nvPr/>
         </p:nvSpPr>
@@ -10108,7 +10096,7 @@
       </p:sp>
       <p:sp>
         <p:nvSpPr>
-          <p:cNvPr id="70" name="TextBox 69"/>
+          <p:cNvPr id="65" name="TextBox 64"/>
           <p:cNvSpPr txBox="1"/>
           <p:nvPr/>
         </p:nvSpPr>
@@ -10162,27 +10150,21 @@
       <p:grpSpPr/>
       <p:sp>
         <p:nvSpPr>
-          <p:cNvPr id="5" name="DeckTitle"/>
-          <p:cNvSpPr txBox="1"/>
-          <p:nvPr/>
-        </p:nvSpPr>
-        <p:spPr>
-          <a:xfrm>
-            <a:off x="1078992" y="768096"/>
-            <a:ext cx="8869680" cy="658368"/>
-          </a:xfrm>
-          <a:prstGeom prst="rect">
-            <a:avLst/>
-          </a:prstGeom>
-          <a:noFill/>
-        </p:spPr>
-        <p:txBody>
-          <a:bodyPr wrap="none">
-            <a:spAutoFit/>
-          </a:bodyPr>
+          <p:cNvPr id="2" name="DeckTitle"/>
+          <p:cNvSpPr>
+            <a:spLocks noGrp="1"/>
+          </p:cNvSpPr>
+          <p:nvPr>
+            <p:ph type="title"/>
+          </p:nvPr>
+        </p:nvSpPr>
+        <p:spPr/>
+        <p:txBody>
+          <a:bodyPr/>
           <a:lstStyle/>
           <a:p>
             <a:pPr algn="l">
+              <a:buNone/>
               <a:defRPr sz="3100" b="0">
                 <a:solidFill>
                   <a:srgbClr val="000000"/>
@@ -10198,7 +10180,7 @@
       </p:sp>
       <p:sp>
         <p:nvSpPr>
-          <p:cNvPr id="6" name="TextBox 5"/>
+          <p:cNvPr id="3" name="TextBox 2"/>
           <p:cNvSpPr txBox="1"/>
           <p:nvPr/>
         </p:nvSpPr>
@@ -10234,7 +10216,7 @@
       </p:sp>
       <p:sp>
         <p:nvSpPr>
-          <p:cNvPr id="7" name="Rounded Rectangle 6"/>
+          <p:cNvPr id="4" name="Rounded Rectangle 3"/>
           <p:cNvSpPr/>
           <p:nvPr/>
         </p:nvSpPr>
@@ -10289,7 +10271,7 @@
       </p:sp>
       <p:sp>
         <p:nvSpPr>
-          <p:cNvPr id="8" name="Rounded Rectangle 7"/>
+          <p:cNvPr id="5" name="Rounded Rectangle 4"/>
           <p:cNvSpPr/>
           <p:nvPr/>
         </p:nvSpPr>
@@ -10344,7 +10326,7 @@
       </p:sp>
       <p:sp>
         <p:nvSpPr>
-          <p:cNvPr id="9" name="Rounded Rectangle 8"/>
+          <p:cNvPr id="6" name="Rounded Rectangle 5"/>
           <p:cNvSpPr/>
           <p:nvPr/>
         </p:nvSpPr>
@@ -10399,7 +10381,7 @@
       </p:sp>
       <p:sp>
         <p:nvSpPr>
-          <p:cNvPr id="10" name="Rounded Rectangle 9"/>
+          <p:cNvPr id="7" name="Rounded Rectangle 6"/>
           <p:cNvSpPr/>
           <p:nvPr/>
         </p:nvSpPr>
@@ -10454,7 +10436,7 @@
       </p:sp>
       <p:cxnSp>
         <p:nvCxnSpPr>
-          <p:cNvPr id="11" name="Connector 10"/>
+          <p:cNvPr id="8" name="Connector 7"/>
           <p:cNvCxnSpPr/>
           <p:nvPr/>
         </p:nvCxnSpPr>
@@ -10489,7 +10471,7 @@
       </p:cxnSp>
       <p:cxnSp>
         <p:nvCxnSpPr>
-          <p:cNvPr id="12" name="Connector 11"/>
+          <p:cNvPr id="9" name="Connector 8"/>
           <p:cNvCxnSpPr/>
           <p:nvPr/>
         </p:nvCxnSpPr>
@@ -10524,7 +10506,7 @@
       </p:cxnSp>
       <p:cxnSp>
         <p:nvCxnSpPr>
-          <p:cNvPr id="13" name="Connector 12"/>
+          <p:cNvPr id="10" name="Connector 9"/>
           <p:cNvCxnSpPr/>
           <p:nvPr/>
         </p:nvCxnSpPr>
@@ -10559,7 +10541,7 @@
       </p:cxnSp>
       <p:sp>
         <p:nvSpPr>
-          <p:cNvPr id="14" name="Rounded Rectangle 13"/>
+          <p:cNvPr id="11" name="Rounded Rectangle 10"/>
           <p:cNvSpPr/>
           <p:nvPr/>
         </p:nvSpPr>
@@ -10614,7 +10596,7 @@
       </p:sp>
       <p:sp>
         <p:nvSpPr>
-          <p:cNvPr id="15" name="Rounded Rectangle 14"/>
+          <p:cNvPr id="12" name="Rounded Rectangle 11"/>
           <p:cNvSpPr/>
           <p:nvPr/>
         </p:nvSpPr>
@@ -10669,7 +10651,7 @@
       </p:sp>
       <p:sp>
         <p:nvSpPr>
-          <p:cNvPr id="16" name="Rounded Rectangle 15"/>
+          <p:cNvPr id="13" name="Rounded Rectangle 12"/>
           <p:cNvSpPr/>
           <p:nvPr/>
         </p:nvSpPr>
@@ -10724,7 +10706,7 @@
       </p:sp>
       <p:sp>
         <p:nvSpPr>
-          <p:cNvPr id="17" name="Rectangle 16"/>
+          <p:cNvPr id="14" name="Rectangle 13"/>
           <p:cNvSpPr/>
           <p:nvPr/>
         </p:nvSpPr>
@@ -10769,7 +10751,7 @@
       </p:sp>
       <p:sp>
         <p:nvSpPr>
-          <p:cNvPr id="18" name="Rectangle 17"/>
+          <p:cNvPr id="15" name="Rectangle 14"/>
           <p:cNvSpPr/>
           <p:nvPr/>
         </p:nvSpPr>
@@ -10814,7 +10796,7 @@
       </p:sp>
       <p:sp>
         <p:nvSpPr>
-          <p:cNvPr id="19" name="Rectangle 18"/>
+          <p:cNvPr id="16" name="Rectangle 15"/>
           <p:cNvSpPr/>
           <p:nvPr/>
         </p:nvSpPr>
@@ -10859,7 +10841,7 @@
       </p:sp>
       <p:sp>
         <p:nvSpPr>
-          <p:cNvPr id="20" name="Rectangle 19"/>
+          <p:cNvPr id="17" name="Rectangle 16"/>
           <p:cNvSpPr/>
           <p:nvPr/>
         </p:nvSpPr>
@@ -10904,7 +10886,7 @@
       </p:sp>
       <p:sp>
         <p:nvSpPr>
-          <p:cNvPr id="21" name="Rectangle 20"/>
+          <p:cNvPr id="18" name="Rectangle 17"/>
           <p:cNvSpPr/>
           <p:nvPr/>
         </p:nvSpPr>
@@ -10949,7 +10931,7 @@
       </p:sp>
       <p:sp>
         <p:nvSpPr>
-          <p:cNvPr id="22" name="Rectangle 21"/>
+          <p:cNvPr id="19" name="Rectangle 18"/>
           <p:cNvSpPr/>
           <p:nvPr/>
         </p:nvSpPr>
@@ -10994,7 +10976,7 @@
       </p:sp>
       <p:sp>
         <p:nvSpPr>
-          <p:cNvPr id="23" name="Rectangle 22"/>
+          <p:cNvPr id="20" name="Rectangle 19"/>
           <p:cNvSpPr/>
           <p:nvPr/>
         </p:nvSpPr>
@@ -11039,7 +11021,7 @@
       </p:sp>
       <p:sp>
         <p:nvSpPr>
-          <p:cNvPr id="24" name="Rectangle 23"/>
+          <p:cNvPr id="21" name="Rectangle 20"/>
           <p:cNvSpPr/>
           <p:nvPr/>
         </p:nvSpPr>
@@ -11084,7 +11066,7 @@
       </p:sp>
       <p:sp>
         <p:nvSpPr>
-          <p:cNvPr id="25" name="Rectangle 24"/>
+          <p:cNvPr id="22" name="Rectangle 21"/>
           <p:cNvSpPr/>
           <p:nvPr/>
         </p:nvSpPr>
@@ -11129,7 +11111,7 @@
       </p:sp>
       <p:sp>
         <p:nvSpPr>
-          <p:cNvPr id="26" name="Rectangle 25"/>
+          <p:cNvPr id="23" name="Rectangle 22"/>
           <p:cNvSpPr/>
           <p:nvPr/>
         </p:nvSpPr>
@@ -11174,7 +11156,7 @@
       </p:sp>
       <p:sp>
         <p:nvSpPr>
-          <p:cNvPr id="27" name="Rectangle 26"/>
+          <p:cNvPr id="24" name="Rectangle 23"/>
           <p:cNvSpPr/>
           <p:nvPr/>
         </p:nvSpPr>
@@ -11219,7 +11201,7 @@
       </p:sp>
       <p:sp>
         <p:nvSpPr>
-          <p:cNvPr id="28" name="Rectangle 27"/>
+          <p:cNvPr id="25" name="Rectangle 24"/>
           <p:cNvSpPr/>
           <p:nvPr/>
         </p:nvSpPr>
@@ -11264,7 +11246,7 @@
       </p:sp>
       <p:sp>
         <p:nvSpPr>
-          <p:cNvPr id="29" name="Rectangle 28"/>
+          <p:cNvPr id="26" name="Rectangle 25"/>
           <p:cNvSpPr/>
           <p:nvPr/>
         </p:nvSpPr>
@@ -11309,7 +11291,7 @@
       </p:sp>
       <p:sp>
         <p:nvSpPr>
-          <p:cNvPr id="30" name="TextBox 29"/>
+          <p:cNvPr id="27" name="TextBox 26"/>
           <p:cNvSpPr txBox="1"/>
           <p:nvPr/>
         </p:nvSpPr>
@@ -11345,7 +11327,7 @@
       </p:sp>
       <p:sp>
         <p:nvSpPr>
-          <p:cNvPr id="31" name="Rectangle 30"/>
+          <p:cNvPr id="28" name="Rectangle 27"/>
           <p:cNvSpPr/>
           <p:nvPr/>
         </p:nvSpPr>
@@ -11390,7 +11372,7 @@
       </p:sp>
       <p:sp>
         <p:nvSpPr>
-          <p:cNvPr id="32" name="TextBox 31"/>
+          <p:cNvPr id="29" name="TextBox 28"/>
           <p:cNvSpPr txBox="1"/>
           <p:nvPr/>
         </p:nvSpPr>
@@ -11426,7 +11408,7 @@
       </p:sp>
       <p:sp>
         <p:nvSpPr>
-          <p:cNvPr id="33" name="Rectangle 32"/>
+          <p:cNvPr id="30" name="Rectangle 29"/>
           <p:cNvSpPr/>
           <p:nvPr/>
         </p:nvSpPr>
@@ -11471,7 +11453,7 @@
       </p:sp>
       <p:sp>
         <p:nvSpPr>
-          <p:cNvPr id="34" name="TextBox 33"/>
+          <p:cNvPr id="31" name="TextBox 30"/>
           <p:cNvSpPr txBox="1"/>
           <p:nvPr/>
         </p:nvSpPr>
@@ -11507,7 +11489,7 @@
       </p:sp>
       <p:sp>
         <p:nvSpPr>
-          <p:cNvPr id="35" name="Rectangle 34"/>
+          <p:cNvPr id="32" name="Rectangle 31"/>
           <p:cNvSpPr/>
           <p:nvPr/>
         </p:nvSpPr>
@@ -11552,7 +11534,7 @@
       </p:sp>
       <p:sp>
         <p:nvSpPr>
-          <p:cNvPr id="36" name="TextBox 35"/>
+          <p:cNvPr id="33" name="TextBox 32"/>
           <p:cNvSpPr txBox="1"/>
           <p:nvPr/>
         </p:nvSpPr>
@@ -11588,7 +11570,7 @@
       </p:sp>
       <p:sp>
         <p:nvSpPr>
-          <p:cNvPr id="37" name="Rounded Rectangle 36"/>
+          <p:cNvPr id="34" name="Rounded Rectangle 33"/>
           <p:cNvSpPr/>
           <p:nvPr/>
         </p:nvSpPr>
@@ -11675,7 +11657,7 @@
       </p:sp>
       <p:sp>
         <p:nvSpPr>
-          <p:cNvPr id="38" name="Rounded Rectangle 37"/>
+          <p:cNvPr id="35" name="Rounded Rectangle 34"/>
           <p:cNvSpPr/>
           <p:nvPr/>
         </p:nvSpPr>
@@ -11762,7 +11744,7 @@
       </p:sp>
       <p:sp>
         <p:nvSpPr>
-          <p:cNvPr id="39" name="Rounded Rectangle 38"/>
+          <p:cNvPr id="36" name="Rounded Rectangle 35"/>
           <p:cNvSpPr/>
           <p:nvPr/>
         </p:nvSpPr>
@@ -11849,7 +11831,7 @@
       </p:sp>
       <p:sp>
         <p:nvSpPr>
-          <p:cNvPr id="40" name="TextBox 39"/>
+          <p:cNvPr id="37" name="TextBox 36"/>
           <p:cNvSpPr txBox="1"/>
           <p:nvPr/>
         </p:nvSpPr>
@@ -11885,7 +11867,7 @@
       </p:sp>
       <p:sp>
         <p:nvSpPr>
-          <p:cNvPr id="41" name="TextBox 40"/>
+          <p:cNvPr id="38" name="TextBox 37"/>
           <p:cNvSpPr txBox="1"/>
           <p:nvPr/>
         </p:nvSpPr>
@@ -11939,27 +11921,21 @@
       <p:grpSpPr/>
       <p:sp>
         <p:nvSpPr>
-          <p:cNvPr id="5" name="DeckTitle"/>
-          <p:cNvSpPr txBox="1"/>
-          <p:nvPr/>
-        </p:nvSpPr>
-        <p:spPr>
-          <a:xfrm>
-            <a:off x="1078992" y="768096"/>
-            <a:ext cx="8869680" cy="658368"/>
-          </a:xfrm>
-          <a:prstGeom prst="rect">
-            <a:avLst/>
-          </a:prstGeom>
-          <a:noFill/>
-        </p:spPr>
-        <p:txBody>
-          <a:bodyPr wrap="none">
-            <a:spAutoFit/>
-          </a:bodyPr>
+          <p:cNvPr id="2" name="DeckTitle"/>
+          <p:cNvSpPr>
+            <a:spLocks noGrp="1"/>
+          </p:cNvSpPr>
+          <p:nvPr>
+            <p:ph type="title"/>
+          </p:nvPr>
+        </p:nvSpPr>
+        <p:spPr/>
+        <p:txBody>
+          <a:bodyPr/>
           <a:lstStyle/>
           <a:p>
             <a:pPr algn="l">
+              <a:buNone/>
               <a:defRPr sz="3100" b="0">
                 <a:solidFill>
                   <a:srgbClr val="000000"/>
@@ -11975,7 +11951,7 @@
       </p:sp>
       <p:sp>
         <p:nvSpPr>
-          <p:cNvPr id="6" name="TextBox 5"/>
+          <p:cNvPr id="3" name="TextBox 2"/>
           <p:cNvSpPr txBox="1"/>
           <p:nvPr/>
         </p:nvSpPr>
@@ -12011,7 +11987,7 @@
       </p:sp>
       <p:sp>
         <p:nvSpPr>
-          <p:cNvPr id="7" name="Rounded Rectangle 6"/>
+          <p:cNvPr id="4" name="Rounded Rectangle 3"/>
           <p:cNvSpPr/>
           <p:nvPr/>
         </p:nvSpPr>
@@ -12098,7 +12074,7 @@
       </p:sp>
       <p:sp>
         <p:nvSpPr>
-          <p:cNvPr id="8" name="Rounded Rectangle 7"/>
+          <p:cNvPr id="5" name="Rounded Rectangle 4"/>
           <p:cNvSpPr/>
           <p:nvPr/>
         </p:nvSpPr>
@@ -12185,7 +12161,7 @@
       </p:sp>
       <p:sp>
         <p:nvSpPr>
-          <p:cNvPr id="9" name="Rounded Rectangle 8"/>
+          <p:cNvPr id="6" name="Rounded Rectangle 5"/>
           <p:cNvSpPr/>
           <p:nvPr/>
         </p:nvSpPr>
@@ -12272,7 +12248,7 @@
       </p:sp>
       <p:sp>
         <p:nvSpPr>
-          <p:cNvPr id="10" name="Rounded Rectangle 9"/>
+          <p:cNvPr id="7" name="Rounded Rectangle 6"/>
           <p:cNvSpPr/>
           <p:nvPr/>
         </p:nvSpPr>
@@ -12359,7 +12335,7 @@
       </p:sp>
       <p:sp>
         <p:nvSpPr>
-          <p:cNvPr id="11" name="Rounded Rectangle 10"/>
+          <p:cNvPr id="8" name="Rounded Rectangle 7"/>
           <p:cNvSpPr/>
           <p:nvPr/>
         </p:nvSpPr>
@@ -12414,7 +12390,7 @@
       </p:sp>
       <p:sp>
         <p:nvSpPr>
-          <p:cNvPr id="12" name="TextBox 11"/>
+          <p:cNvPr id="9" name="TextBox 8"/>
           <p:cNvSpPr txBox="1"/>
           <p:nvPr/>
         </p:nvSpPr>
@@ -12450,7 +12426,7 @@
       </p:sp>
       <p:sp>
         <p:nvSpPr>
-          <p:cNvPr id="13" name="TextBox 12"/>
+          <p:cNvPr id="10" name="TextBox 9"/>
           <p:cNvSpPr txBox="1"/>
           <p:nvPr/>
         </p:nvSpPr>
